--- a/プレゼンテーション3.pptx
+++ b/プレゼンテーション3.pptx
@@ -6,6 +6,8 @@
   </p:sldMasterIdLst>
   <p:sldIdLst>
     <p:sldId id="256" r:id="rId2"/>
+    <p:sldId id="257" r:id="rId3"/>
+    <p:sldId id="258" r:id="rId4"/>
   </p:sldIdLst>
   <p:sldSz cx="12192000" cy="6858000"/>
   <p:notesSz cx="6858000" cy="9144000"/>
@@ -104,6 +106,11 @@
       </a:defRPr>
     </a:lvl9pPr>
   </p:defaultTextStyle>
+  <p:extLst>
+    <p:ext uri="{EFAFB233-063F-42B5-8137-9DF3F51BA10A}">
+      <p15:sldGuideLst xmlns:p15="http://schemas.microsoft.com/office/powerpoint/2012/main"/>
+    </p:ext>
+  </p:extLst>
 </p:presentation>
 </file>
 
@@ -4467,6 +4474,342 @@
     <p:extLst>
       <p:ext uri="{BB962C8B-B14F-4D97-AF65-F5344CB8AC3E}">
         <p14:creationId xmlns:p14="http://schemas.microsoft.com/office/powerpoint/2010/main" val="1718906102"/>
+      </p:ext>
+    </p:extLst>
+  </p:cSld>
+  <p:clrMapOvr>
+    <a:masterClrMapping/>
+  </p:clrMapOvr>
+</p:sld>
+</file>
+
+<file path=ppt/slides/slide2.xml><?xml version="1.0" encoding="utf-8"?>
+<p:sld xmlns:a="http://schemas.openxmlformats.org/drawingml/2006/main" xmlns:r="http://schemas.openxmlformats.org/officeDocument/2006/relationships" xmlns:p="http://schemas.openxmlformats.org/presentationml/2006/main">
+  <p:cSld>
+    <p:spTree>
+      <p:nvGrpSpPr>
+        <p:cNvPr id="1" name="">
+          <a:extLst>
+            <a:ext uri="{FF2B5EF4-FFF2-40B4-BE49-F238E27FC236}">
+              <a16:creationId xmlns:a16="http://schemas.microsoft.com/office/drawing/2014/main" id="{C2C42F0B-5832-F74D-000C-51FD6A66F580}"/>
+            </a:ext>
+          </a:extLst>
+        </p:cNvPr>
+        <p:cNvGrpSpPr/>
+        <p:nvPr/>
+      </p:nvGrpSpPr>
+      <p:grpSpPr>
+        <a:xfrm>
+          <a:off x="0" y="0"/>
+          <a:ext cx="0" cy="0"/>
+          <a:chOff x="0" y="0"/>
+          <a:chExt cx="0" cy="0"/>
+        </a:xfrm>
+      </p:grpSpPr>
+      <p:pic>
+        <p:nvPicPr>
+          <p:cNvPr id="4" name="図 3" descr="文房具, 筆記用具, 鉛筆 が含まれている画像&#10;&#10;AI 生成コンテンツは誤りを含む可能性があります。">
+            <a:extLst>
+              <a:ext uri="{FF2B5EF4-FFF2-40B4-BE49-F238E27FC236}">
+                <a16:creationId xmlns:a16="http://schemas.microsoft.com/office/drawing/2014/main" id="{FCBCC104-D5AF-DC52-073E-CB62FCDA0B90}"/>
+              </a:ext>
+            </a:extLst>
+          </p:cNvPr>
+          <p:cNvPicPr>
+            <a:picLocks noChangeAspect="1"/>
+          </p:cNvPicPr>
+          <p:nvPr/>
+        </p:nvPicPr>
+        <p:blipFill>
+          <a:blip r:embed="rId2">
+            <a:extLst>
+              <a:ext uri="{28A0092B-C50C-407E-A947-70E740481C1C}">
+                <a14:useLocalDpi xmlns:a14="http://schemas.microsoft.com/office/drawing/2010/main" val="0"/>
+              </a:ext>
+            </a:extLst>
+          </a:blip>
+          <a:stretch>
+            <a:fillRect/>
+          </a:stretch>
+        </p:blipFill>
+        <p:spPr>
+          <a:xfrm>
+            <a:off x="2667000" y="0"/>
+            <a:ext cx="6858000" cy="6858000"/>
+          </a:xfrm>
+          <a:prstGeom prst="rect">
+            <a:avLst/>
+          </a:prstGeom>
+        </p:spPr>
+      </p:pic>
+      <p:sp>
+        <p:nvSpPr>
+          <p:cNvPr id="24" name="正方形/長方形 23">
+            <a:extLst>
+              <a:ext uri="{FF2B5EF4-FFF2-40B4-BE49-F238E27FC236}">
+                <a16:creationId xmlns:a16="http://schemas.microsoft.com/office/drawing/2014/main" id="{0B91A6D7-6888-0A37-C35C-2CE64DF4A872}"/>
+              </a:ext>
+            </a:extLst>
+          </p:cNvPr>
+          <p:cNvSpPr/>
+          <p:nvPr/>
+        </p:nvSpPr>
+        <p:spPr>
+          <a:xfrm>
+            <a:off x="4297680" y="2945130"/>
+            <a:ext cx="2945130" cy="355918"/>
+          </a:xfrm>
+          <a:prstGeom prst="rect">
+            <a:avLst/>
+          </a:prstGeom>
+          <a:noFill/>
+          <a:ln w="76200"/>
+        </p:spPr>
+        <p:style>
+          <a:lnRef idx="2">
+            <a:schemeClr val="accent1">
+              <a:shade val="15000"/>
+            </a:schemeClr>
+          </a:lnRef>
+          <a:fillRef idx="1">
+            <a:schemeClr val="accent1"/>
+          </a:fillRef>
+          <a:effectRef idx="0">
+            <a:schemeClr val="accent1"/>
+          </a:effectRef>
+          <a:fontRef idx="minor">
+            <a:schemeClr val="lt1"/>
+          </a:fontRef>
+        </p:style>
+        <p:txBody>
+          <a:bodyPr rtlCol="0" anchor="ctr"/>
+          <a:lstStyle/>
+          <a:p>
+            <a:pPr algn="ctr"/>
+            <a:endParaRPr kumimoji="1" lang="ja-JP" altLang="en-US"/>
+          </a:p>
+        </p:txBody>
+      </p:sp>
+    </p:spTree>
+    <p:extLst>
+      <p:ext uri="{BB962C8B-B14F-4D97-AF65-F5344CB8AC3E}">
+        <p14:creationId xmlns:p14="http://schemas.microsoft.com/office/powerpoint/2010/main" val="1220756581"/>
+      </p:ext>
+    </p:extLst>
+  </p:cSld>
+  <p:clrMapOvr>
+    <a:masterClrMapping/>
+  </p:clrMapOvr>
+</p:sld>
+</file>
+
+<file path=ppt/slides/slide3.xml><?xml version="1.0" encoding="utf-8"?>
+<p:sld xmlns:a="http://schemas.openxmlformats.org/drawingml/2006/main" xmlns:r="http://schemas.openxmlformats.org/officeDocument/2006/relationships" xmlns:p="http://schemas.openxmlformats.org/presentationml/2006/main">
+  <p:cSld>
+    <p:spTree>
+      <p:nvGrpSpPr>
+        <p:cNvPr id="1" name="">
+          <a:extLst>
+            <a:ext uri="{FF2B5EF4-FFF2-40B4-BE49-F238E27FC236}">
+              <a16:creationId xmlns:a16="http://schemas.microsoft.com/office/drawing/2014/main" id="{65DAFE32-8CFD-71E2-31A7-6859DB3AF841}"/>
+            </a:ext>
+          </a:extLst>
+        </p:cNvPr>
+        <p:cNvGrpSpPr/>
+        <p:nvPr/>
+      </p:nvGrpSpPr>
+      <p:grpSpPr>
+        <a:xfrm>
+          <a:off x="0" y="0"/>
+          <a:ext cx="0" cy="0"/>
+          <a:chOff x="0" y="0"/>
+          <a:chExt cx="0" cy="0"/>
+        </a:xfrm>
+      </p:grpSpPr>
+      <p:pic>
+        <p:nvPicPr>
+          <p:cNvPr id="4" name="図 3" descr="文房具, 筆記用具, 鉛筆 が含まれている画像&#10;&#10;AI 生成コンテンツは誤りを含む可能性があります。">
+            <a:extLst>
+              <a:ext uri="{FF2B5EF4-FFF2-40B4-BE49-F238E27FC236}">
+                <a16:creationId xmlns:a16="http://schemas.microsoft.com/office/drawing/2014/main" id="{15D7D7E1-0443-DBC1-5B04-FF29BEC90206}"/>
+              </a:ext>
+            </a:extLst>
+          </p:cNvPr>
+          <p:cNvPicPr>
+            <a:picLocks noChangeAspect="1"/>
+          </p:cNvPicPr>
+          <p:nvPr/>
+        </p:nvPicPr>
+        <p:blipFill>
+          <a:blip r:embed="rId2">
+            <a:extLst>
+              <a:ext uri="{28A0092B-C50C-407E-A947-70E740481C1C}">
+                <a14:useLocalDpi xmlns:a14="http://schemas.microsoft.com/office/drawing/2010/main" val="0"/>
+              </a:ext>
+            </a:extLst>
+          </a:blip>
+          <a:stretch>
+            <a:fillRect/>
+          </a:stretch>
+        </p:blipFill>
+        <p:spPr>
+          <a:xfrm>
+            <a:off x="2667000" y="0"/>
+            <a:ext cx="6858000" cy="6858000"/>
+          </a:xfrm>
+          <a:prstGeom prst="rect">
+            <a:avLst/>
+          </a:prstGeom>
+        </p:spPr>
+      </p:pic>
+      <p:sp>
+        <p:nvSpPr>
+          <p:cNvPr id="24" name="正方形/長方形 23">
+            <a:extLst>
+              <a:ext uri="{FF2B5EF4-FFF2-40B4-BE49-F238E27FC236}">
+                <a16:creationId xmlns:a16="http://schemas.microsoft.com/office/drawing/2014/main" id="{D0F970EF-413E-668F-BA8B-776793499AFA}"/>
+              </a:ext>
+            </a:extLst>
+          </p:cNvPr>
+          <p:cNvSpPr/>
+          <p:nvPr/>
+        </p:nvSpPr>
+        <p:spPr>
+          <a:xfrm>
+            <a:off x="4184332" y="2825671"/>
+            <a:ext cx="1547495" cy="355918"/>
+          </a:xfrm>
+          <a:prstGeom prst="rect">
+            <a:avLst/>
+          </a:prstGeom>
+          <a:noFill/>
+          <a:ln w="76200"/>
+        </p:spPr>
+        <p:style>
+          <a:lnRef idx="2">
+            <a:schemeClr val="accent1">
+              <a:shade val="15000"/>
+            </a:schemeClr>
+          </a:lnRef>
+          <a:fillRef idx="1">
+            <a:schemeClr val="accent1"/>
+          </a:fillRef>
+          <a:effectRef idx="0">
+            <a:schemeClr val="accent1"/>
+          </a:effectRef>
+          <a:fontRef idx="minor">
+            <a:schemeClr val="lt1"/>
+          </a:fontRef>
+        </p:style>
+        <p:txBody>
+          <a:bodyPr rtlCol="0" anchor="ctr"/>
+          <a:lstStyle/>
+          <a:p>
+            <a:pPr algn="ctr"/>
+            <a:endParaRPr kumimoji="1" lang="ja-JP" altLang="en-US"/>
+          </a:p>
+        </p:txBody>
+      </p:sp>
+      <p:sp>
+        <p:nvSpPr>
+          <p:cNvPr id="2" name="正方形/長方形 1">
+            <a:extLst>
+              <a:ext uri="{FF2B5EF4-FFF2-40B4-BE49-F238E27FC236}">
+                <a16:creationId xmlns:a16="http://schemas.microsoft.com/office/drawing/2014/main" id="{3BF13869-4ABE-C1DA-D0A0-09296B0063BB}"/>
+              </a:ext>
+            </a:extLst>
+          </p:cNvPr>
+          <p:cNvSpPr/>
+          <p:nvPr/>
+        </p:nvSpPr>
+        <p:spPr>
+          <a:xfrm>
+            <a:off x="4958080" y="2945130"/>
+            <a:ext cx="1547495" cy="355918"/>
+          </a:xfrm>
+          <a:prstGeom prst="rect">
+            <a:avLst/>
+          </a:prstGeom>
+          <a:noFill/>
+          <a:ln w="76200"/>
+        </p:spPr>
+        <p:style>
+          <a:lnRef idx="2">
+            <a:schemeClr val="accent1">
+              <a:shade val="15000"/>
+            </a:schemeClr>
+          </a:lnRef>
+          <a:fillRef idx="1">
+            <a:schemeClr val="accent1"/>
+          </a:fillRef>
+          <a:effectRef idx="0">
+            <a:schemeClr val="accent1"/>
+          </a:effectRef>
+          <a:fontRef idx="minor">
+            <a:schemeClr val="lt1"/>
+          </a:fontRef>
+        </p:style>
+        <p:txBody>
+          <a:bodyPr rtlCol="0" anchor="ctr"/>
+          <a:lstStyle/>
+          <a:p>
+            <a:pPr algn="ctr"/>
+            <a:endParaRPr kumimoji="1" lang="ja-JP" altLang="en-US"/>
+          </a:p>
+        </p:txBody>
+      </p:sp>
+      <p:sp>
+        <p:nvSpPr>
+          <p:cNvPr id="3" name="正方形/長方形 2">
+            <a:extLst>
+              <a:ext uri="{FF2B5EF4-FFF2-40B4-BE49-F238E27FC236}">
+                <a16:creationId xmlns:a16="http://schemas.microsoft.com/office/drawing/2014/main" id="{C9B8E929-CA8F-CD82-6C52-0EC3F3DE4EE7}"/>
+              </a:ext>
+            </a:extLst>
+          </p:cNvPr>
+          <p:cNvSpPr/>
+          <p:nvPr/>
+        </p:nvSpPr>
+        <p:spPr>
+          <a:xfrm>
+            <a:off x="5837555" y="3045619"/>
+            <a:ext cx="1547495" cy="355918"/>
+          </a:xfrm>
+          <a:prstGeom prst="rect">
+            <a:avLst/>
+          </a:prstGeom>
+          <a:noFill/>
+          <a:ln w="76200"/>
+        </p:spPr>
+        <p:style>
+          <a:lnRef idx="2">
+            <a:schemeClr val="accent1">
+              <a:shade val="15000"/>
+            </a:schemeClr>
+          </a:lnRef>
+          <a:fillRef idx="1">
+            <a:schemeClr val="accent1"/>
+          </a:fillRef>
+          <a:effectRef idx="0">
+            <a:schemeClr val="accent1"/>
+          </a:effectRef>
+          <a:fontRef idx="minor">
+            <a:schemeClr val="lt1"/>
+          </a:fontRef>
+        </p:style>
+        <p:txBody>
+          <a:bodyPr rtlCol="0" anchor="ctr"/>
+          <a:lstStyle/>
+          <a:p>
+            <a:pPr algn="ctr"/>
+            <a:endParaRPr kumimoji="1" lang="ja-JP" altLang="en-US"/>
+          </a:p>
+        </p:txBody>
+      </p:sp>
+    </p:spTree>
+    <p:extLst>
+      <p:ext uri="{BB962C8B-B14F-4D97-AF65-F5344CB8AC3E}">
+        <p14:creationId xmlns:p14="http://schemas.microsoft.com/office/powerpoint/2010/main" val="1331255893"/>
       </p:ext>
     </p:extLst>
   </p:cSld>
